--- a/media/exports/reports/2025-10/growth-trades.pptx
+++ b/media/exports/reports/2025-10/growth-trades.pptx
@@ -213,43 +213,43 @@
                 <c:formatCode>$#,##0;[Red]($#,##0);"-"</c:formatCode>
                 <c:ptCount val="13"/>
                 <c:pt idx="0">
-                  <c:v>171009</c:v>
+                  <c:v>191014</c:v>
                 </c:pt>
                 <c:pt idx="1">
-                  <c:v>179474</c:v>
+                  <c:v>200124</c:v>
                 </c:pt>
                 <c:pt idx="2">
-                  <c:v>143156</c:v>
+                  <c:v>159406</c:v>
                 </c:pt>
                 <c:pt idx="3">
-                  <c:v>140909</c:v>
+                  <c:v>156794</c:v>
                 </c:pt>
                 <c:pt idx="4">
-                  <c:v>160943</c:v>
+                  <c:v>179190</c:v>
                 </c:pt>
                 <c:pt idx="5">
-                  <c:v>135082</c:v>
+                  <c:v>150465</c:v>
                 </c:pt>
                 <c:pt idx="6">
-                  <c:v>124705</c:v>
+                  <c:v>138865</c:v>
                 </c:pt>
                 <c:pt idx="7">
-                  <c:v>129816</c:v>
+                  <c:v>144649</c:v>
                 </c:pt>
                 <c:pt idx="8">
-                  <c:v>164113</c:v>
+                  <c:v>183265</c:v>
                 </c:pt>
                 <c:pt idx="9">
-                  <c:v>186760</c:v>
+                  <c:v>208588</c:v>
                 </c:pt>
                 <c:pt idx="10">
-                  <c:v>139164</c:v>
+                  <c:v>155118</c:v>
                 </c:pt>
                 <c:pt idx="11">
-                  <c:v>128255</c:v>
+                  <c:v>143077</c:v>
                 </c:pt>
                 <c:pt idx="12">
-                  <c:v>128898</c:v>
+                  <c:v>143566</c:v>
                 </c:pt>
               </c:numCache>
             </c:numRef>
@@ -298,7 +298,7 @@
         <c:axId val="-2100718248"/>
         <c:scaling>
           <c:orientation val="minMax"/>
-          <c:max val="200000.0"/>
+          <c:max val="250000.0"/>
           <c:min val="0.0"/>
         </c:scaling>
         <c:delete val="0"/>
@@ -459,43 +459,43 @@
                 <c:formatCode>$#,##0;[Red]($#,##0);"-"</c:formatCode>
                 <c:ptCount val="13"/>
                 <c:pt idx="0">
-                  <c:v>24670</c:v>
+                  <c:v>27650</c:v>
                 </c:pt>
                 <c:pt idx="1">
-                  <c:v>24670</c:v>
+                  <c:v>27650</c:v>
                 </c:pt>
                 <c:pt idx="2">
-                  <c:v>24670</c:v>
+                  <c:v>27650</c:v>
                 </c:pt>
                 <c:pt idx="3">
-                  <c:v>24670</c:v>
+                  <c:v>27650</c:v>
                 </c:pt>
                 <c:pt idx="4">
-                  <c:v>27930</c:v>
+                  <c:v>31300</c:v>
                 </c:pt>
                 <c:pt idx="5">
-                  <c:v>27930</c:v>
+                  <c:v>31300</c:v>
                 </c:pt>
                 <c:pt idx="6">
-                  <c:v>27930</c:v>
+                  <c:v>31300</c:v>
                 </c:pt>
                 <c:pt idx="7">
-                  <c:v>27930</c:v>
+                  <c:v>31300</c:v>
                 </c:pt>
                 <c:pt idx="8">
-                  <c:v>31870</c:v>
+                  <c:v>35720</c:v>
                 </c:pt>
                 <c:pt idx="9">
-                  <c:v>33200</c:v>
+                  <c:v>37200</c:v>
                 </c:pt>
                 <c:pt idx="10">
-                  <c:v>33200</c:v>
+                  <c:v>37200</c:v>
                 </c:pt>
                 <c:pt idx="11">
-                  <c:v>33200</c:v>
+                  <c:v>37200</c:v>
                 </c:pt>
                 <c:pt idx="12">
-                  <c:v>35800</c:v>
+                  <c:v>40100</c:v>
                 </c:pt>
               </c:numCache>
             </c:numRef>
@@ -544,7 +544,7 @@
         <c:axId val="-2100718248"/>
         <c:scaling>
           <c:orientation val="minMax"/>
-          <c:max val="40000.0"/>
+          <c:max val="50000.0"/>
           <c:min val="0.0"/>
         </c:scaling>
         <c:delete val="0"/>
@@ -705,43 +705,43 @@
                 <c:formatCode>$#,##0;[Red]($#,##0);"-"</c:formatCode>
                 <c:ptCount val="13"/>
                 <c:pt idx="0">
+                  <c:v>141600</c:v>
+                </c:pt>
+                <c:pt idx="1">
+                  <c:v>147100</c:v>
+                </c:pt>
+                <c:pt idx="2">
+                  <c:v>103700</c:v>
+                </c:pt>
+                <c:pt idx="3">
+                  <c:v>100100</c:v>
+                </c:pt>
+                <c:pt idx="4">
+                  <c:v>118600</c:v>
+                </c:pt>
+                <c:pt idx="5">
+                  <c:v>96400</c:v>
+                </c:pt>
+                <c:pt idx="6">
+                  <c:v>83900</c:v>
+                </c:pt>
+                <c:pt idx="7">
+                  <c:v>89900</c:v>
+                </c:pt>
+                <c:pt idx="8">
                   <c:v>126300</c:v>
                 </c:pt>
-                <c:pt idx="1">
-                  <c:v>131400</c:v>
-                </c:pt>
-                <c:pt idx="2">
-                  <c:v>92600</c:v>
-                </c:pt>
-                <c:pt idx="3">
-                  <c:v>89400</c:v>
-                </c:pt>
-                <c:pt idx="4">
-                  <c:v>106000</c:v>
-                </c:pt>
-                <c:pt idx="5">
-                  <c:v>86100</c:v>
-                </c:pt>
-                <c:pt idx="6">
-                  <c:v>74900</c:v>
-                </c:pt>
-                <c:pt idx="7">
-                  <c:v>80300</c:v>
-                </c:pt>
-                <c:pt idx="8">
-                  <c:v>112700</c:v>
-                </c:pt>
                 <c:pt idx="9">
-                  <c:v>135800</c:v>
+                  <c:v>152100</c:v>
                 </c:pt>
                 <c:pt idx="10">
-                  <c:v>86200</c:v>
+                  <c:v>96500</c:v>
                 </c:pt>
                 <c:pt idx="11">
-                  <c:v>75100</c:v>
+                  <c:v>84200</c:v>
                 </c:pt>
                 <c:pt idx="12">
-                  <c:v>70800</c:v>
+                  <c:v>79300</c:v>
                 </c:pt>
               </c:numCache>
             </c:numRef>
@@ -790,7 +790,7 @@
         <c:axId val="-2100718248"/>
         <c:scaling>
           <c:orientation val="minMax"/>
-          <c:max val="150000.0"/>
+          <c:max val="200000.0"/>
           <c:min val="0.0"/>
         </c:scaling>
         <c:delete val="0"/>
@@ -951,43 +951,43 @@
                 <c:formatCode>$#,##0;[Red]($#,##0);"-"</c:formatCode>
                 <c:ptCount val="13"/>
                 <c:pt idx="0">
-                  <c:v>20039</c:v>
+                  <c:v>21764</c:v>
                 </c:pt>
                 <c:pt idx="1">
-                  <c:v>23404</c:v>
+                  <c:v>25374</c:v>
                 </c:pt>
                 <c:pt idx="2">
-                  <c:v>25886</c:v>
+                  <c:v>28056</c:v>
                 </c:pt>
                 <c:pt idx="3">
-                  <c:v>26839</c:v>
+                  <c:v>29044</c:v>
                 </c:pt>
                 <c:pt idx="4">
-                  <c:v>27013</c:v>
+                  <c:v>29290</c:v>
                 </c:pt>
                 <c:pt idx="5">
-                  <c:v>21052</c:v>
+                  <c:v>22765</c:v>
                 </c:pt>
                 <c:pt idx="6">
-                  <c:v>21875</c:v>
+                  <c:v>23665</c:v>
                 </c:pt>
                 <c:pt idx="7">
-                  <c:v>21586</c:v>
+                  <c:v>23449</c:v>
                 </c:pt>
                 <c:pt idx="8">
-                  <c:v>19543</c:v>
+                  <c:v>21245</c:v>
                 </c:pt>
                 <c:pt idx="9">
-                  <c:v>17760</c:v>
+                  <c:v>19288</c:v>
                 </c:pt>
                 <c:pt idx="10">
-                  <c:v>19764</c:v>
+                  <c:v>21418</c:v>
                 </c:pt>
                 <c:pt idx="11">
-                  <c:v>19955</c:v>
+                  <c:v>21677</c:v>
                 </c:pt>
                 <c:pt idx="12">
-                  <c:v>22298</c:v>
+                  <c:v>24166</c:v>
                 </c:pt>
               </c:numCache>
             </c:numRef>
@@ -1036,7 +1036,7 @@
         <c:axId val="-2100718248"/>
         <c:scaling>
           <c:orientation val="minMax"/>
-          <c:max val="30000.0"/>
+          <c:max val="40000.0"/>
           <c:min val="0.0"/>
         </c:scaling>
         <c:delete val="0"/>
@@ -1561,7 +1561,7 @@
           <a:lstStyle/>
           <a:p>
             <a:r>
-              <a:t>Trades · All. October against October last year: (24.6%); Year to date (Jul to Oct 2025): $583,077; Gross margin, year to date: 38.6%. Revenue is $583,077 this financial year to date (Jul to Oct 2025). Maintenance contracts make the highest gross margin (59.5%); Installations the lowest (29.8%). The business needs 52.5% gross margin just to cover overheads. Installations: 29.8% gross margin, 5.2 points under the 35.0% target: about $19,103 on $367,900 of revenue this financial year to date. It's below the 52.5% needed to cover overheads, too. Maintenance contracts: 59.5% gross margin, 24.5 points over the 35.0% target ($33,156 ahead on $135,400 this financial year to date).</a:t>
+              <a:t>Trades · All. October against October last year: (24.8%); Year to date (Jul to Oct 2025): $650,349; Gross margin, year to date: 44.9%. Revenue is $650,349 this financial year to date (Jul to Oct 2025). Maintenance contracts make the highest gross margin (63.8%); Installations the lowest (37.3%). The business needs 62.0% gross margin just to cover overheads. Installations: 37.3% gross margin, 2.3 points over the 35.0% target ($9,627 ahead on $412,100 this financial year to date). Maintenance contracts: 63.8% gross margin, 28.8 points over the 35.0% target ($43,751 ahead on $151,700 this financial year to date).</a:t>
             </a:r>
           </a:p>
         </p:txBody>
@@ -1631,7 +1631,7 @@
           <a:lstStyle/>
           <a:p>
             <a:r>
-              <a:t>Trades · Maintenance contracts. October against October last year: 45.1%; Year to date (Jul to Oct 2025): $135,400; Gross margin, year to date: 59.5%. Maintenance contracts brought in $135,400 this financial year to date, at a 59.5% gross margin (above the 38.6% overall). Maintenance contracts: 59.5% gross margin, 24.5 points over the 35.0% target ($33,156 ahead on $135,400 this financial year to date).</a:t>
+              <a:t>Trades · Maintenance contracts. October against October last year: 45.0%; Year to date (Jul to Oct 2025): $151,700; Gross margin, year to date: 63.8%. Maintenance contracts brought in $151,700 this financial year to date, at a 63.8% gross margin (above the 44.9% overall). Maintenance contracts: 63.8% gross margin, 28.8 points over the 35.0% target ($43,751 ahead on $151,700 this financial year to date).</a:t>
             </a:r>
           </a:p>
         </p:txBody>
@@ -1701,7 +1701,7 @@
           <a:lstStyle/>
           <a:p>
             <a:r>
-              <a:t>Trades · Installations. October against October last year: (43.9%); Year to date (Jul to Oct 2025): $367,900; Gross margin, year to date: 29.8%. Installations brought in $367,900 this financial year to date, at a 29.8% gross margin (below the 38.6% overall). Installations: 29.8% gross margin, 5.2 points under the 35.0% target: about $19,103 on $367,900 of revenue this financial year to date. It's below the 52.5% needed to cover overheads, too.</a:t>
+              <a:t>Trades · Installations. October against October last year: (44.0%); Year to date (Jul to Oct 2025): $412,100; Gross margin, year to date: 37.3%. Installations brought in $412,100 this financial year to date, at a 37.3% gross margin (below the 44.9% overall). Installations: 37.3% gross margin, 2.3 points over the 35.0% target ($9,627 ahead on $412,100 this financial year to date).</a:t>
             </a:r>
           </a:p>
         </p:txBody>
@@ -1771,7 +1771,7 @@
           <a:lstStyle/>
           <a:p>
             <a:r>
-              <a:t>Trades · Call-outs and repairs. October against October last year: 11.3%; Year to date (Jul to Oct 2025): $79,777; Gross margin, year to date: 43.6%. Call-outs and repairs brought in $79,777 this financial year to date, at a 43.6% gross margin (above the 38.6% overall). Call-outs and repairs: 43.6% gross margin, 8.6 points over the 35.0% target ($6,857 ahead on $79,777 this financial year to date).</a:t>
+              <a:t>Trades · Call-outs and repairs. October against October last year: 11.0%; Year to date (Jul to Oct 2025): $86,549; Gross margin, year to date: 48.0%. Call-outs and repairs brought in $86,549 this financial year to date, at a 48.0% gross margin (above the 44.9% overall). Call-outs and repairs: 48.0% gross margin, 13.0 points over the 35.0% target ($11,259 ahead on $86,549 this financial year to date).</a:t>
             </a:r>
           </a:p>
         </p:txBody>
@@ -1841,7 +1841,7 @@
           <a:lstStyle/>
           <a:p>
             <a:r>
-              <a:t>By line: financial year to date (Jul to Oct 2025) against the same period last year · Trades. Same period last year: Not available: the data starts October 2024. From gross margin to profit: October's jobs made $49,446 gross margin (38.4%). Technician time not charged to jobs took $9,638 and overheads $57,980, leaving ($18,172) profit before tax ((14.1%) of revenue). To cover overheads, jobs need a 52.5% gross margin on average.</a:t>
+              <a:t>By line: financial year to date (Jul to Oct 2025) against the same period last year · Trades. Same period last year: Not available: the data starts October 2024. From gross margin to profit: October's jobs made $64,114 gross margin (44.7%). Technician time not charged to jobs took $31,056 and overheads $57,980, leaving ($24,922) profit before tax ((17.4%) of revenue). To cover overheads, jobs need a 62.0% gross margin on average.</a:t>
             </a:r>
           </a:p>
         </p:txBody>
@@ -5256,7 +5256,7 @@
                 </a:solidFill>
                 <a:latin typeface="Roboto"/>
               </a:rPr>
-              <a:t>Data retrieved 2pm, Tue 6 Oct 2026 · Generated 8 Oct 2026, 9:35am · Sample data · Made with Python (python-pptx)</a:t>
+              <a:t>Data retrieved 2pm, Tue 6 Oct 2026 · Generated 9 Oct 2026, 8:41am · Sample data · Made with Python (python-pptx)</a:t>
             </a:r>
           </a:p>
         </p:txBody>
@@ -5602,7 +5602,7 @@
                 </a:solidFill>
                 <a:latin typeface="Roboto"/>
               </a:rPr>
-              <a:t>(24.6%)</a:t>
+              <a:t>(24.8%)</a:t>
             </a:r>
           </a:p>
         </p:txBody>
@@ -5641,7 +5641,7 @@
                 </a:solidFill>
                 <a:latin typeface="Roboto"/>
               </a:rPr>
-              <a:t>$128,898 against $171,009</a:t>
+              <a:t>$143,566 against $191,014</a:t>
             </a:r>
           </a:p>
         </p:txBody>
@@ -5768,7 +5768,7 @@
                 </a:solidFill>
                 <a:latin typeface="Roboto"/>
               </a:rPr>
-              <a:t>$583,077</a:t>
+              <a:t>$650,349</a:t>
             </a:r>
           </a:p>
         </p:txBody>
@@ -5934,7 +5934,7 @@
                 </a:solidFill>
                 <a:latin typeface="Roboto"/>
               </a:rPr>
-              <a:t>38.6%</a:t>
+              <a:t>44.9%</a:t>
             </a:r>
           </a:p>
         </p:txBody>
@@ -5973,7 +5973,7 @@
                 </a:solidFill>
                 <a:latin typeface="Roboto"/>
               </a:rPr>
-              <a:t>$224,987 before overheads</a:t>
+              <a:t>$292,259 before overheads</a:t>
             </a:r>
           </a:p>
         </p:txBody>
@@ -5988,7 +5988,7 @@
         </p:nvGraphicFramePr>
         <p:xfrm>
           <a:off x="457200" y="2604516"/>
-          <a:ext cx="11277295" cy="2119884"/>
+          <a:ext cx="11277295" cy="2318004"/>
         </p:xfrm>
         <a:graphic>
           <a:graphicData uri="http://schemas.openxmlformats.org/drawingml/2006/chart">
@@ -6004,8 +6004,8 @@
         </p:nvSpPr>
         <p:spPr>
           <a:xfrm>
-            <a:off x="457200" y="4815840"/>
-            <a:ext cx="5501487" cy="1493520"/>
+            <a:off x="457200" y="5013960"/>
+            <a:ext cx="5501487" cy="1295400"/>
           </a:xfrm>
           <a:prstGeom prst="rect">
             <a:avLst/>
@@ -6053,7 +6053,7 @@
         </p:nvSpPr>
         <p:spPr>
           <a:xfrm>
-            <a:off x="594360" y="4870704"/>
+            <a:off x="594360" y="5068824"/>
             <a:ext cx="5227167" cy="274320"/>
           </a:xfrm>
           <a:prstGeom prst="rect">
@@ -6092,8 +6092,8 @@
         </p:nvSpPr>
         <p:spPr>
           <a:xfrm>
-            <a:off x="594360" y="5145024"/>
-            <a:ext cx="5227167" cy="1127760"/>
+            <a:off x="594360" y="5343144"/>
+            <a:ext cx="5227167" cy="929640"/>
           </a:xfrm>
           <a:prstGeom prst="rect">
             <a:avLst/>
@@ -6118,7 +6118,7 @@
                 </a:solidFill>
                 <a:latin typeface="Roboto"/>
               </a:rPr>
-              <a:t>Revenue is $583,077 this financial year to date (Jul to Oct 2025). Maintenance contracts make the highest gross margin (59.5%); Installations the lowest (29.8%). The business needs 52.5% gross margin just to cover overheads.</a:t>
+              <a:t>Revenue is $650,349 this financial year to date (Jul to Oct 2025). Maintenance contracts make the highest gross margin (63.8%); Installations the lowest (37.3%). The business needs 62.0% gross margin just to cover overheads.</a:t>
             </a:r>
           </a:p>
         </p:txBody>
@@ -6131,8 +6131,8 @@
         </p:nvSpPr>
         <p:spPr>
           <a:xfrm>
-            <a:off x="6233007" y="4815840"/>
-            <a:ext cx="5501487" cy="1493520"/>
+            <a:off x="6233007" y="5013960"/>
+            <a:ext cx="5501487" cy="1295400"/>
           </a:xfrm>
           <a:prstGeom prst="rect">
             <a:avLst/>
@@ -6180,7 +6180,7 @@
         </p:nvSpPr>
         <p:spPr>
           <a:xfrm>
-            <a:off x="6370167" y="4870704"/>
+            <a:off x="6370167" y="5068824"/>
             <a:ext cx="5227167" cy="274320"/>
           </a:xfrm>
           <a:prstGeom prst="rect">
@@ -6219,8 +6219,8 @@
         </p:nvSpPr>
         <p:spPr>
           <a:xfrm>
-            <a:off x="6370167" y="5145024"/>
-            <a:ext cx="5227167" cy="1127760"/>
+            <a:off x="6370167" y="5343144"/>
+            <a:ext cx="5227167" cy="929640"/>
           </a:xfrm>
           <a:prstGeom prst="rect">
             <a:avLst/>
@@ -6245,7 +6245,7 @@
                 </a:solidFill>
                 <a:latin typeface="Roboto"/>
               </a:rPr>
-              <a:t>Installations: 29.8% gross margin, 5.2 points under the 35.0% target: about $19,103 on $367,900 of revenue this financial year to date. It's below the 52.5% needed to cover overheads, too. Maintenance contracts: 59.5% gross margin, 24.5 points over the 35.0% target ($33,156 ahead on $135,400 this financial year to date).</a:t>
+              <a:t>Installations: 37.3% gross margin, 2.3 points over the 35.0% target ($9,627 ahead on $412,100 this financial year to date). Maintenance contracts: 63.8% gross margin, 28.8 points over the 35.0% target ($43,751 ahead on $151,700 this financial year to date).</a:t>
             </a:r>
           </a:p>
         </p:txBody>
@@ -6323,7 +6323,7 @@
                 </a:solidFill>
                 <a:latin typeface="Roboto"/>
               </a:rPr>
-              <a:t>Data retrieved 2pm, Tue 6 Oct 2026 · Generated 8 Oct 2026, 9:35am · Sample data · Made with Python (python-pptx)</a:t>
+              <a:t>Data retrieved 2pm, Tue 6 Oct 2026 · Generated 9 Oct 2026, 8:41am · Sample data · Made with Python (python-pptx)</a:t>
             </a:r>
           </a:p>
         </p:txBody>
@@ -6669,7 +6669,7 @@
                 </a:solidFill>
                 <a:latin typeface="Roboto"/>
               </a:rPr>
-              <a:t>45.1%</a:t>
+              <a:t>45.0%</a:t>
             </a:r>
           </a:p>
         </p:txBody>
@@ -6708,7 +6708,7 @@
                 </a:solidFill>
                 <a:latin typeface="Roboto"/>
               </a:rPr>
-              <a:t>$35,800 against $24,670</a:t>
+              <a:t>$40,100 against $27,650</a:t>
             </a:r>
           </a:p>
         </p:txBody>
@@ -6835,7 +6835,7 @@
                 </a:solidFill>
                 <a:latin typeface="Roboto"/>
               </a:rPr>
-              <a:t>$135,400</a:t>
+              <a:t>$151,700</a:t>
             </a:r>
           </a:p>
         </p:txBody>
@@ -7001,7 +7001,7 @@
                 </a:solidFill>
                 <a:latin typeface="Roboto"/>
               </a:rPr>
-              <a:t>59.5%</a:t>
+              <a:t>63.8%</a:t>
             </a:r>
           </a:p>
         </p:txBody>
@@ -7040,7 +7040,7 @@
                 </a:solidFill>
                 <a:latin typeface="Roboto"/>
               </a:rPr>
-              <a:t>$80,546 before overheads</a:t>
+              <a:t>$96,846 before overheads</a:t>
             </a:r>
           </a:p>
         </p:txBody>
@@ -7185,7 +7185,7 @@
                 </a:solidFill>
                 <a:latin typeface="Roboto"/>
               </a:rPr>
-              <a:t>Maintenance contracts brought in $135,400 this financial year to date, at a 59.5% gross margin (above the 38.6% overall).</a:t>
+              <a:t>Maintenance contracts brought in $151,700 this financial year to date, at a 63.8% gross margin (above the 44.9% overall).</a:t>
             </a:r>
           </a:p>
         </p:txBody>
@@ -7312,7 +7312,7 @@
                 </a:solidFill>
                 <a:latin typeface="Roboto"/>
               </a:rPr>
-              <a:t>Maintenance contracts: 59.5% gross margin, 24.5 points over the 35.0% target ($33,156 ahead on $135,400 this financial year to date).</a:t>
+              <a:t>Maintenance contracts: 63.8% gross margin, 28.8 points over the 35.0% target ($43,751 ahead on $151,700 this financial year to date).</a:t>
             </a:r>
           </a:p>
         </p:txBody>
@@ -7390,7 +7390,7 @@
                 </a:solidFill>
                 <a:latin typeface="Roboto"/>
               </a:rPr>
-              <a:t>Data retrieved 2pm, Tue 6 Oct 2026 · Generated 8 Oct 2026, 9:35am · Sample data · Made with Python (python-pptx)</a:t>
+              <a:t>Data retrieved 2pm, Tue 6 Oct 2026 · Generated 9 Oct 2026, 8:41am · Sample data · Made with Python (python-pptx)</a:t>
             </a:r>
           </a:p>
         </p:txBody>
@@ -7736,7 +7736,7 @@
                 </a:solidFill>
                 <a:latin typeface="Roboto"/>
               </a:rPr>
-              <a:t>(43.9%)</a:t>
+              <a:t>(44.0%)</a:t>
             </a:r>
           </a:p>
         </p:txBody>
@@ -7775,7 +7775,7 @@
                 </a:solidFill>
                 <a:latin typeface="Roboto"/>
               </a:rPr>
-              <a:t>$70,800 against $126,300</a:t>
+              <a:t>$79,300 against $141,600</a:t>
             </a:r>
           </a:p>
         </p:txBody>
@@ -7902,7 +7902,7 @@
                 </a:solidFill>
                 <a:latin typeface="Roboto"/>
               </a:rPr>
-              <a:t>$367,900</a:t>
+              <a:t>$412,100</a:t>
             </a:r>
           </a:p>
         </p:txBody>
@@ -8068,7 +8068,7 @@
                 </a:solidFill>
                 <a:latin typeface="Roboto"/>
               </a:rPr>
-              <a:t>29.8%</a:t>
+              <a:t>37.3%</a:t>
             </a:r>
           </a:p>
         </p:txBody>
@@ -8107,7 +8107,7 @@
                 </a:solidFill>
                 <a:latin typeface="Roboto"/>
               </a:rPr>
-              <a:t>$109,662 before overheads</a:t>
+              <a:t>$153,862 before overheads</a:t>
             </a:r>
           </a:p>
         </p:txBody>
@@ -8122,7 +8122,7 @@
         </p:nvGraphicFramePr>
         <p:xfrm>
           <a:off x="457200" y="2604516"/>
-          <a:ext cx="11277295" cy="2516124"/>
+          <a:ext cx="11277295" cy="2714244"/>
         </p:xfrm>
         <a:graphic>
           <a:graphicData uri="http://schemas.openxmlformats.org/drawingml/2006/chart">
@@ -8138,8 +8138,8 @@
         </p:nvSpPr>
         <p:spPr>
           <a:xfrm>
-            <a:off x="457200" y="5212080"/>
-            <a:ext cx="5501487" cy="1097280"/>
+            <a:off x="457200" y="5410200"/>
+            <a:ext cx="5501487" cy="899160"/>
           </a:xfrm>
           <a:prstGeom prst="rect">
             <a:avLst/>
@@ -8187,7 +8187,7 @@
         </p:nvSpPr>
         <p:spPr>
           <a:xfrm>
-            <a:off x="594360" y="5266944"/>
+            <a:off x="594360" y="5465064"/>
             <a:ext cx="5227167" cy="274320"/>
           </a:xfrm>
           <a:prstGeom prst="rect">
@@ -8226,8 +8226,8 @@
         </p:nvSpPr>
         <p:spPr>
           <a:xfrm>
-            <a:off x="594360" y="5541264"/>
-            <a:ext cx="5227167" cy="731520"/>
+            <a:off x="594360" y="5739384"/>
+            <a:ext cx="5227167" cy="533400"/>
           </a:xfrm>
           <a:prstGeom prst="rect">
             <a:avLst/>
@@ -8252,7 +8252,7 @@
                 </a:solidFill>
                 <a:latin typeface="Roboto"/>
               </a:rPr>
-              <a:t>Installations brought in $367,900 this financial year to date, at a 29.8% gross margin (below the 38.6% overall).</a:t>
+              <a:t>Installations brought in $412,100 this financial year to date, at a 37.3% gross margin (below the 44.9% overall).</a:t>
             </a:r>
           </a:p>
         </p:txBody>
@@ -8265,8 +8265,8 @@
         </p:nvSpPr>
         <p:spPr>
           <a:xfrm>
-            <a:off x="6233007" y="5212080"/>
-            <a:ext cx="5501487" cy="1097280"/>
+            <a:off x="6233007" y="5410200"/>
+            <a:ext cx="5501487" cy="899160"/>
           </a:xfrm>
           <a:prstGeom prst="rect">
             <a:avLst/>
@@ -8314,7 +8314,7 @@
         </p:nvSpPr>
         <p:spPr>
           <a:xfrm>
-            <a:off x="6370167" y="5266944"/>
+            <a:off x="6370167" y="5465064"/>
             <a:ext cx="5227167" cy="274320"/>
           </a:xfrm>
           <a:prstGeom prst="rect">
@@ -8353,8 +8353,8 @@
         </p:nvSpPr>
         <p:spPr>
           <a:xfrm>
-            <a:off x="6370167" y="5541264"/>
-            <a:ext cx="5227167" cy="731520"/>
+            <a:off x="6370167" y="5739384"/>
+            <a:ext cx="5227167" cy="533400"/>
           </a:xfrm>
           <a:prstGeom prst="rect">
             <a:avLst/>
@@ -8379,7 +8379,7 @@
                 </a:solidFill>
                 <a:latin typeface="Roboto"/>
               </a:rPr>
-              <a:t>Installations: 29.8% gross margin, 5.2 points under the 35.0% target: about $19,103 on $367,900 of revenue this financial year to date. It's below the 52.5% needed to cover overheads, too.</a:t>
+              <a:t>Installations: 37.3% gross margin, 2.3 points over the 35.0% target ($9,627 ahead on $412,100 this financial year to date).</a:t>
             </a:r>
           </a:p>
         </p:txBody>
@@ -8457,7 +8457,7 @@
                 </a:solidFill>
                 <a:latin typeface="Roboto"/>
               </a:rPr>
-              <a:t>Data retrieved 2pm, Tue 6 Oct 2026 · Generated 8 Oct 2026, 9:35am · Sample data · Made with Python (python-pptx)</a:t>
+              <a:t>Data retrieved 2pm, Tue 6 Oct 2026 · Generated 9 Oct 2026, 8:41am · Sample data · Made with Python (python-pptx)</a:t>
             </a:r>
           </a:p>
         </p:txBody>
@@ -8803,7 +8803,7 @@
                 </a:solidFill>
                 <a:latin typeface="Roboto"/>
               </a:rPr>
-              <a:t>11.3%</a:t>
+              <a:t>11.0%</a:t>
             </a:r>
           </a:p>
         </p:txBody>
@@ -8842,7 +8842,7 @@
                 </a:solidFill>
                 <a:latin typeface="Roboto"/>
               </a:rPr>
-              <a:t>$22,298 against $20,039</a:t>
+              <a:t>$24,166 against $21,764</a:t>
             </a:r>
           </a:p>
         </p:txBody>
@@ -8969,7 +8969,7 @@
                 </a:solidFill>
                 <a:latin typeface="Roboto"/>
               </a:rPr>
-              <a:t>$79,777</a:t>
+              <a:t>$86,549</a:t>
             </a:r>
           </a:p>
         </p:txBody>
@@ -9135,7 +9135,7 @@
                 </a:solidFill>
                 <a:latin typeface="Roboto"/>
               </a:rPr>
-              <a:t>43.6%</a:t>
+              <a:t>48.0%</a:t>
             </a:r>
           </a:p>
         </p:txBody>
@@ -9174,7 +9174,7 @@
                 </a:solidFill>
                 <a:latin typeface="Roboto"/>
               </a:rPr>
-              <a:t>$34,779 before overheads</a:t>
+              <a:t>$41,551 before overheads</a:t>
             </a:r>
           </a:p>
         </p:txBody>
@@ -9319,7 +9319,7 @@
                 </a:solidFill>
                 <a:latin typeface="Roboto"/>
               </a:rPr>
-              <a:t>Call-outs and repairs brought in $79,777 this financial year to date, at a 43.6% gross margin (above the 38.6% overall).</a:t>
+              <a:t>Call-outs and repairs brought in $86,549 this financial year to date, at a 48.0% gross margin (above the 44.9% overall).</a:t>
             </a:r>
           </a:p>
         </p:txBody>
@@ -9446,7 +9446,7 @@
                 </a:solidFill>
                 <a:latin typeface="Roboto"/>
               </a:rPr>
-              <a:t>Call-outs and repairs: 43.6% gross margin, 8.6 points over the 35.0% target ($6,857 ahead on $79,777 this financial year to date).</a:t>
+              <a:t>Call-outs and repairs: 48.0% gross margin, 13.0 points over the 35.0% target ($11,259 ahead on $86,549 this financial year to date).</a:t>
             </a:r>
           </a:p>
         </p:txBody>
@@ -9524,7 +9524,7 @@
                 </a:solidFill>
                 <a:latin typeface="Roboto"/>
               </a:rPr>
-              <a:t>Data retrieved 2pm, Tue 6 Oct 2026 · Generated 8 Oct 2026, 9:35am · Sample data · Made with Python (python-pptx)</a:t>
+              <a:t>Data retrieved 2pm, Tue 6 Oct 2026 · Generated 9 Oct 2026, 8:41am · Sample data · Made with Python (python-pptx)</a:t>
             </a:r>
           </a:p>
         </p:txBody>
@@ -9743,7 +9743,7 @@
                 </a:solidFill>
                 <a:latin typeface="Roboto"/>
               </a:rPr>
-              <a:t>Same period last year: Not available: the data starts October 2024. From gross margin to profit: October's jobs made $49,446 gross margin (38.4%). Technician time not charged to jobs took $9,638 and overheads $57,980, leaving ($18,172) profit before tax ((14.1%) of revenue). To cover overheads, jobs need a 52.5% gross margin on average.</a:t>
+              <a:t>Same period last year: Not available: the data starts October 2024. From gross margin to profit: October's jobs made $64,114 gross margin (44.7%). Technician time not charged to jobs took $31,056 and overheads $57,980, leaving ($24,922) profit before tax ((17.4%) of revenue). To cover overheads, jobs need a 62.0% gross margin on average.</a:t>
             </a:r>
           </a:p>
         </p:txBody>
@@ -9974,7 +9974,7 @@
                           </a:solidFill>
                           <a:latin typeface="Roboto"/>
                         </a:rPr>
-                        <a:t>$135,400</a:t>
+                        <a:t>$151,700</a:t>
                       </a:r>
                     </a:p>
                   </a:txBody>
@@ -10055,7 +10055,7 @@
                           </a:solidFill>
                           <a:latin typeface="Roboto"/>
                         </a:rPr>
-                        <a:t>$80,546</a:t>
+                        <a:t>$96,846</a:t>
                       </a:r>
                     </a:p>
                   </a:txBody>
@@ -10082,7 +10082,7 @@
                           </a:solidFill>
                           <a:latin typeface="Roboto"/>
                         </a:rPr>
-                        <a:t>59.5%</a:t>
+                        <a:t>63.8%</a:t>
                       </a:r>
                     </a:p>
                   </a:txBody>
@@ -10138,7 +10138,7 @@
                           </a:solidFill>
                           <a:latin typeface="Roboto"/>
                         </a:rPr>
-                        <a:t>$367,900</a:t>
+                        <a:t>$412,100</a:t>
                       </a:r>
                     </a:p>
                   </a:txBody>
@@ -10219,7 +10219,7 @@
                           </a:solidFill>
                           <a:latin typeface="Roboto"/>
                         </a:rPr>
-                        <a:t>$109,662</a:t>
+                        <a:t>$153,862</a:t>
                       </a:r>
                     </a:p>
                   </a:txBody>
@@ -10246,7 +10246,7 @@
                           </a:solidFill>
                           <a:latin typeface="Roboto"/>
                         </a:rPr>
-                        <a:t>29.8%</a:t>
+                        <a:t>37.3%</a:t>
                       </a:r>
                     </a:p>
                   </a:txBody>
@@ -10302,7 +10302,7 @@
                           </a:solidFill>
                           <a:latin typeface="Roboto"/>
                         </a:rPr>
-                        <a:t>$79,777</a:t>
+                        <a:t>$86,549</a:t>
                       </a:r>
                     </a:p>
                   </a:txBody>
@@ -10383,7 +10383,7 @@
                           </a:solidFill>
                           <a:latin typeface="Roboto"/>
                         </a:rPr>
-                        <a:t>$34,779</a:t>
+                        <a:t>$41,551</a:t>
                       </a:r>
                     </a:p>
                   </a:txBody>
@@ -10410,7 +10410,7 @@
                           </a:solidFill>
                           <a:latin typeface="Roboto"/>
                         </a:rPr>
-                        <a:t>43.6%</a:t>
+                        <a:t>48.0%</a:t>
                       </a:r>
                     </a:p>
                   </a:txBody>
@@ -10466,7 +10466,7 @@
                           </a:solidFill>
                           <a:latin typeface="Roboto"/>
                         </a:rPr>
-                        <a:t>$583,077</a:t>
+                        <a:t>$650,349</a:t>
                       </a:r>
                     </a:p>
                   </a:txBody>
@@ -10547,7 +10547,7 @@
                           </a:solidFill>
                           <a:latin typeface="Roboto"/>
                         </a:rPr>
-                        <a:t>$224,987</a:t>
+                        <a:t>$292,259</a:t>
                       </a:r>
                     </a:p>
                   </a:txBody>
@@ -10574,7 +10574,7 @@
                           </a:solidFill>
                           <a:latin typeface="Roboto"/>
                         </a:rPr>
-                        <a:t>38.6%</a:t>
+                        <a:t>44.9%</a:t>
                       </a:r>
                     </a:p>
                   </a:txBody>
@@ -10662,7 +10662,7 @@
                 </a:solidFill>
                 <a:latin typeface="Roboto"/>
               </a:rPr>
-              <a:t>Data retrieved 2pm, Tue 6 Oct 2026 · Generated 8 Oct 2026, 9:35am · Sample data · Made with Python (python-pptx)</a:t>
+              <a:t>Data retrieved 2pm, Tue 6 Oct 2026 · Generated 9 Oct 2026, 8:41am · Sample data · Made with Python (python-pptx)</a:t>
             </a:r>
           </a:p>
         </p:txBody>
